--- a/prompt-engineering-course/prompt_engineering_presentation_support/PE_S8_safety-security.pptx
+++ b/prompt-engineering-course/prompt_engineering_presentation_support/PE_S8_safety-security.pptx
@@ -4203,7 +4203,7 @@
     <p:bg>
       <p:bgPr>
         <a:solidFill>
-          <a:srgbClr val="281C16"/>
+          <a:srgbClr val="301A12"/>
         </a:solidFill>
       </p:bgPr>
     </p:bg>
@@ -4229,12 +4229,12 @@
         </p:nvSpPr>
         <p:spPr>
           <a:xfrm>
-            <a:off x="10588752" y="502920"/>
-            <a:ext cx="1051560" cy="384048"/>
+            <a:off x="10405872" y="457200"/>
+            <a:ext cx="1234440" cy="457200"/>
           </a:xfrm>
           <a:prstGeom prst="roundRect">
             <a:avLst>
-              <a:gd name="adj" fmla="val 47619"/>
+              <a:gd name="adj" fmla="val 20000"/>
             </a:avLst>
           </a:prstGeom>
           <a:solidFill>
@@ -4251,8 +4251,8 @@
         </p:nvSpPr>
         <p:spPr>
           <a:xfrm>
-            <a:off x="10588752" y="502920"/>
-            <a:ext cx="1051560" cy="384048"/>
+            <a:off x="10405872" y="457200"/>
+            <a:ext cx="1234440" cy="457200"/>
           </a:xfrm>
           <a:prstGeom prst="rect">
             <a:avLst/>
@@ -4268,17 +4268,17 @@
               <a:buNone/>
             </a:pPr>
             <a:r>
-              <a:rPr lang="en-US" sz="1300" b="1" spc="200" kern="0" dirty="0">
-                <a:solidFill>
-                  <a:srgbClr val="281C16"/>
+              <a:rPr lang="en-US" sz="1400" b="1" spc="200" kern="0" dirty="0">
+                <a:solidFill>
+                  <a:srgbClr val="301A12"/>
                 </a:solidFill>
                 <a:latin typeface="Courier New" pitchFamily="34" charset="0"/>
                 <a:ea typeface="Courier New" pitchFamily="34" charset="-122"/>
                 <a:cs typeface="Courier New" pitchFamily="34" charset="-120"/>
               </a:rPr>
-              <a:t>GIT</a:t>
-            </a:r>
-            <a:endParaRPr lang="en-US" sz="1300" dirty="0"/>
+              <a:t>● GIT</a:t>
+            </a:r>
+            <a:endParaRPr lang="en-US" sz="1400" dirty="0"/>
           </a:p>
         </p:txBody>
       </p:sp>
@@ -4348,7 +4348,7 @@
             <a:r>
               <a:rPr lang="en-US" sz="3400" b="1" dirty="0">
                 <a:solidFill>
-                  <a:srgbClr val="C0CAF5"/>
+                  <a:srgbClr val="F6E6DB"/>
                 </a:solidFill>
                 <a:latin typeface="Calibri" pitchFamily="34" charset="0"/>
                 <a:ea typeface="Calibri" pitchFamily="34" charset="-122"/>
@@ -4377,11 +4377,11 @@
             </a:avLst>
           </a:prstGeom>
           <a:solidFill>
-            <a:srgbClr val="24283B"/>
+            <a:srgbClr val="3E2418"/>
           </a:solidFill>
           <a:ln w="12700">
             <a:solidFill>
-              <a:srgbClr val="2A2E42"/>
+              <a:srgbClr val="5C3421"/>
             </a:solidFill>
             <a:prstDash val="solid"/>
           </a:ln>
@@ -4434,7 +4434,7 @@
             <a:r>
               <a:rPr lang="en-US" sz="1900" b="1" dirty="0">
                 <a:solidFill>
-                  <a:srgbClr val="1A1B26"/>
+                  <a:srgbClr val="301A12"/>
                 </a:solidFill>
                 <a:latin typeface="Courier New" pitchFamily="34" charset="0"/>
                 <a:ea typeface="Courier New" pitchFamily="34" charset="-122"/>
@@ -4473,7 +4473,7 @@
             <a:r>
               <a:rPr lang="en-US" sz="1700" b="1" dirty="0">
                 <a:solidFill>
-                  <a:srgbClr val="C0CAF5"/>
+                  <a:srgbClr val="F6E6DB"/>
                 </a:solidFill>
                 <a:latin typeface="Calibri" pitchFamily="34" charset="0"/>
                 <a:ea typeface="Calibri" pitchFamily="34" charset="-122"/>
@@ -4512,7 +4512,7 @@
             <a:r>
               <a:rPr lang="en-US" sz="1300" dirty="0">
                 <a:solidFill>
-                  <a:srgbClr val="A9B1D6"/>
+                  <a:srgbClr val="E0C6B6"/>
                 </a:solidFill>
                 <a:latin typeface="Calibri" pitchFamily="34" charset="0"/>
                 <a:ea typeface="Calibri" pitchFamily="34" charset="-122"/>
@@ -4541,11 +4541,11 @@
             </a:avLst>
           </a:prstGeom>
           <a:solidFill>
-            <a:srgbClr val="24283B"/>
+            <a:srgbClr val="3E2418"/>
           </a:solidFill>
           <a:ln w="12700">
             <a:solidFill>
-              <a:srgbClr val="2A2E42"/>
+              <a:srgbClr val="5C3421"/>
             </a:solidFill>
             <a:prstDash val="solid"/>
           </a:ln>
@@ -4598,7 +4598,7 @@
             <a:r>
               <a:rPr lang="en-US" sz="1900" b="1" dirty="0">
                 <a:solidFill>
-                  <a:srgbClr val="1A1B26"/>
+                  <a:srgbClr val="301A12"/>
                 </a:solidFill>
                 <a:latin typeface="Courier New" pitchFamily="34" charset="0"/>
                 <a:ea typeface="Courier New" pitchFamily="34" charset="-122"/>
@@ -4637,7 +4637,7 @@
             <a:r>
               <a:rPr lang="en-US" sz="1700" b="1" dirty="0">
                 <a:solidFill>
-                  <a:srgbClr val="C0CAF5"/>
+                  <a:srgbClr val="F6E6DB"/>
                 </a:solidFill>
                 <a:latin typeface="Calibri" pitchFamily="34" charset="0"/>
                 <a:ea typeface="Calibri" pitchFamily="34" charset="-122"/>
@@ -4676,7 +4676,7 @@
             <a:r>
               <a:rPr lang="en-US" sz="1300" dirty="0">
                 <a:solidFill>
-                  <a:srgbClr val="A9B1D6"/>
+                  <a:srgbClr val="E0C6B6"/>
                 </a:solidFill>
                 <a:latin typeface="Calibri" pitchFamily="34" charset="0"/>
                 <a:ea typeface="Calibri" pitchFamily="34" charset="-122"/>
@@ -4705,11 +4705,11 @@
             </a:avLst>
           </a:prstGeom>
           <a:solidFill>
-            <a:srgbClr val="24283B"/>
+            <a:srgbClr val="3E2418"/>
           </a:solidFill>
           <a:ln w="12700">
             <a:solidFill>
-              <a:srgbClr val="2A2E42"/>
+              <a:srgbClr val="5C3421"/>
             </a:solidFill>
             <a:prstDash val="solid"/>
           </a:ln>
@@ -4762,7 +4762,7 @@
             <a:r>
               <a:rPr lang="en-US" sz="1900" b="1" dirty="0">
                 <a:solidFill>
-                  <a:srgbClr val="1A1B26"/>
+                  <a:srgbClr val="301A12"/>
                 </a:solidFill>
                 <a:latin typeface="Courier New" pitchFamily="34" charset="0"/>
                 <a:ea typeface="Courier New" pitchFamily="34" charset="-122"/>
@@ -4801,7 +4801,7 @@
             <a:r>
               <a:rPr lang="en-US" sz="1700" b="1" dirty="0">
                 <a:solidFill>
-                  <a:srgbClr val="C0CAF5"/>
+                  <a:srgbClr val="F6E6DB"/>
                 </a:solidFill>
                 <a:latin typeface="Calibri" pitchFamily="34" charset="0"/>
                 <a:ea typeface="Calibri" pitchFamily="34" charset="-122"/>
@@ -4840,7 +4840,7 @@
             <a:r>
               <a:rPr lang="en-US" sz="1300" dirty="0">
                 <a:solidFill>
-                  <a:srgbClr val="A9B1D6"/>
+                  <a:srgbClr val="E0C6B6"/>
                 </a:solidFill>
                 <a:latin typeface="Calibri" pitchFamily="34" charset="0"/>
                 <a:ea typeface="Calibri" pitchFamily="34" charset="-122"/>
@@ -4869,11 +4869,11 @@
             </a:avLst>
           </a:prstGeom>
           <a:solidFill>
-            <a:srgbClr val="24283B"/>
+            <a:srgbClr val="3E2418"/>
           </a:solidFill>
           <a:ln w="12700">
             <a:solidFill>
-              <a:srgbClr val="2A2E42"/>
+              <a:srgbClr val="5C3421"/>
             </a:solidFill>
             <a:prstDash val="solid"/>
           </a:ln>
@@ -4926,7 +4926,7 @@
             <a:r>
               <a:rPr lang="en-US" sz="1900" b="1" dirty="0">
                 <a:solidFill>
-                  <a:srgbClr val="1A1B26"/>
+                  <a:srgbClr val="301A12"/>
                 </a:solidFill>
                 <a:latin typeface="Courier New" pitchFamily="34" charset="0"/>
                 <a:ea typeface="Courier New" pitchFamily="34" charset="-122"/>
@@ -4965,7 +4965,7 @@
             <a:r>
               <a:rPr lang="en-US" sz="1700" b="1" dirty="0">
                 <a:solidFill>
-                  <a:srgbClr val="C0CAF5"/>
+                  <a:srgbClr val="F6E6DB"/>
                 </a:solidFill>
                 <a:latin typeface="Calibri" pitchFamily="34" charset="0"/>
                 <a:ea typeface="Calibri" pitchFamily="34" charset="-122"/>
@@ -5004,7 +5004,7 @@
             <a:r>
               <a:rPr lang="en-US" sz="1300" dirty="0">
                 <a:solidFill>
-                  <a:srgbClr val="A9B1D6"/>
+                  <a:srgbClr val="E0C6B6"/>
                 </a:solidFill>
                 <a:latin typeface="Calibri" pitchFamily="34" charset="0"/>
                 <a:ea typeface="Calibri" pitchFamily="34" charset="-122"/>
@@ -5273,8 +5273,47 @@
         </p:nvSpPr>
         <p:spPr>
           <a:xfrm>
-            <a:off x="548640" y="2011680"/>
-            <a:ext cx="6126480" cy="3840480"/>
+            <a:off x="548640" y="1627632"/>
+            <a:ext cx="10881360" cy="502920"/>
+          </a:xfrm>
+          <a:prstGeom prst="rect">
+            <a:avLst/>
+          </a:prstGeom>
+          <a:noFill/>
+          <a:ln/>
+        </p:spPr>
+        <p:txBody>
+          <a:bodyPr wrap="square" lIns="0" tIns="0" rIns="0" bIns="0" rtlCol="0" anchor="t"/>
+          <a:lstStyle/>
+          <a:p>
+            <a:pPr algn="l" indent="0" marL="0">
+              <a:buNone/>
+            </a:pPr>
+            <a:r>
+              <a:rPr lang="en-US" sz="1500" dirty="0">
+                <a:solidFill>
+                  <a:srgbClr val="A9B1D6"/>
+                </a:solidFill>
+                <a:latin typeface="Calibri" pitchFamily="34" charset="0"/>
+                <a:ea typeface="Calibri" pitchFamily="34" charset="-122"/>
+                <a:cs typeface="Calibri" pitchFamily="34" charset="-120"/>
+              </a:rPr>
+              <a:t>Here's the uncomfortable starting point: the model can't tell your instructions from text that arrived with the data.</a:t>
+            </a:r>
+            <a:endParaRPr lang="en-US" sz="1500" dirty="0"/>
+          </a:p>
+        </p:txBody>
+      </p:sp>
+      <p:sp>
+        <p:nvSpPr>
+          <p:cNvPr id="5" name="Text 3"/>
+          <p:cNvSpPr txBox="1"/>
+          <p:nvPr/>
+        </p:nvSpPr>
+        <p:spPr>
+          <a:xfrm>
+            <a:off x="548640" y="2340864"/>
+            <a:ext cx="6126480" cy="3511296"/>
           </a:xfrm>
           <a:prstGeom prst="rect">
             <a:avLst/>
@@ -5412,18 +5451,18 @@
       </p:sp>
       <p:sp>
         <p:nvSpPr>
-          <p:cNvPr id="5" name="Shape 3"/>
+          <p:cNvPr id="6" name="Shape 4"/>
           <p:cNvSpPr/>
           <p:nvPr/>
         </p:nvSpPr>
         <p:spPr>
           <a:xfrm>
-            <a:off x="6995160" y="2148840"/>
-            <a:ext cx="4645152" cy="3383280"/>
+            <a:off x="6995160" y="2478024"/>
+            <a:ext cx="4645152" cy="3054096"/>
           </a:xfrm>
           <a:prstGeom prst="roundRect">
             <a:avLst>
-              <a:gd name="adj" fmla="val 2432"/>
+              <a:gd name="adj" fmla="val 2695"/>
             </a:avLst>
           </a:prstGeom>
           <a:solidFill>
@@ -5439,13 +5478,13 @@
       </p:sp>
       <p:sp>
         <p:nvSpPr>
-          <p:cNvPr id="6" name="Shape 4"/>
+          <p:cNvPr id="7" name="Shape 5"/>
           <p:cNvSpPr/>
           <p:nvPr/>
         </p:nvSpPr>
         <p:spPr>
           <a:xfrm>
-            <a:off x="7269480" y="2423160"/>
+            <a:off x="7269480" y="2752344"/>
             <a:ext cx="457200" cy="457200"/>
           </a:xfrm>
           <a:prstGeom prst="ellipse">
@@ -5459,13 +5498,13 @@
       </p:sp>
       <p:sp>
         <p:nvSpPr>
-          <p:cNvPr id="7" name="Text 5"/>
-          <p:cNvSpPr txBox="1"/>
-          <p:nvPr/>
-        </p:nvSpPr>
-        <p:spPr>
-          <a:xfrm>
-            <a:off x="7818120" y="2450592"/>
+          <p:cNvPr id="8" name="Text 6"/>
+          <p:cNvSpPr txBox="1"/>
+          <p:nvPr/>
+        </p:nvSpPr>
+        <p:spPr>
+          <a:xfrm>
+            <a:off x="7818120" y="2779776"/>
             <a:ext cx="3657600" cy="411480"/>
           </a:xfrm>
           <a:prstGeom prst="rect">
@@ -5498,14 +5537,14 @@
       </p:sp>
       <p:sp>
         <p:nvSpPr>
-          <p:cNvPr id="8" name="Text 6"/>
-          <p:cNvSpPr txBox="1"/>
-          <p:nvPr/>
-        </p:nvSpPr>
-        <p:spPr>
-          <a:xfrm>
-            <a:off x="7269480" y="3108960"/>
-            <a:ext cx="4160520" cy="2286000"/>
+          <p:cNvPr id="9" name="Text 7"/>
+          <p:cNvSpPr txBox="1"/>
+          <p:nvPr/>
+        </p:nvSpPr>
+        <p:spPr>
+          <a:xfrm>
+            <a:off x="7269480" y="3438144"/>
+            <a:ext cx="4160520" cy="1865376"/>
           </a:xfrm>
           <a:prstGeom prst="rect">
             <a:avLst/>
@@ -5537,7 +5576,7 @@
       </p:sp>
       <p:sp>
         <p:nvSpPr>
-          <p:cNvPr id="9" name="Shape 7"/>
+          <p:cNvPr id="10" name="Shape 8"/>
           <p:cNvSpPr/>
           <p:nvPr/>
         </p:nvSpPr>
@@ -5559,7 +5598,7 @@
       </p:sp>
       <p:sp>
         <p:nvSpPr>
-          <p:cNvPr id="10" name="Text 8"/>
+          <p:cNvPr id="11" name="Text 9"/>
           <p:cNvSpPr txBox="1"/>
           <p:nvPr/>
         </p:nvSpPr>
@@ -5598,7 +5637,7 @@
       </p:sp>
       <p:sp>
         <p:nvSpPr>
-          <p:cNvPr id="11" name="Text 9"/>
+          <p:cNvPr id="12" name="Text 10"/>
           <p:cNvSpPr txBox="1"/>
           <p:nvPr/>
         </p:nvSpPr>
@@ -5637,7 +5676,7 @@
       </p:sp>
       <p:sp>
         <p:nvSpPr>
-          <p:cNvPr id="12" name="Text 10"/>
+          <p:cNvPr id="13" name="Text 11"/>
           <p:cNvSpPr txBox="1"/>
           <p:nvPr/>
         </p:nvSpPr>
@@ -5786,13 +5825,52 @@
       </p:sp>
       <p:sp>
         <p:nvSpPr>
-          <p:cNvPr id="4" name="Shape 2"/>
+          <p:cNvPr id="4" name="Text 2"/>
+          <p:cNvSpPr txBox="1"/>
+          <p:nvPr/>
+        </p:nvSpPr>
+        <p:spPr>
+          <a:xfrm>
+            <a:off x="548640" y="1627632"/>
+            <a:ext cx="10881360" cy="502920"/>
+          </a:xfrm>
+          <a:prstGeom prst="rect">
+            <a:avLst/>
+          </a:prstGeom>
+          <a:noFill/>
+          <a:ln/>
+        </p:spPr>
+        <p:txBody>
+          <a:bodyPr wrap="square" lIns="0" tIns="0" rIns="0" bIns="0" rtlCol="0" anchor="t"/>
+          <a:lstStyle/>
+          <a:p>
+            <a:pPr algn="l" indent="0" marL="0">
+              <a:buNone/>
+            </a:pPr>
+            <a:r>
+              <a:rPr lang="en-US" sz="1500" dirty="0">
+                <a:solidFill>
+                  <a:srgbClr val="A9B1D6"/>
+                </a:solidFill>
+                <a:latin typeface="Calibri" pitchFamily="34" charset="0"/>
+                <a:ea typeface="Calibri" pitchFamily="34" charset="-122"/>
+                <a:cs typeface="Calibri" pitchFamily="34" charset="-120"/>
+              </a:rPr>
+              <a:t>Four ways this goes wrong in the wild — the second one is the one most builders never test for.</a:t>
+            </a:r>
+            <a:endParaRPr lang="en-US" sz="1500" dirty="0"/>
+          </a:p>
+        </p:txBody>
+      </p:sp>
+      <p:sp>
+        <p:nvSpPr>
+          <p:cNvPr id="5" name="Shape 3"/>
           <p:cNvSpPr/>
           <p:nvPr/>
         </p:nvSpPr>
         <p:spPr>
           <a:xfrm>
-            <a:off x="548640" y="2103120"/>
+            <a:off x="548640" y="2432304"/>
             <a:ext cx="5394960" cy="1810512"/>
           </a:xfrm>
           <a:prstGeom prst="roundRect">
@@ -5813,13 +5891,13 @@
       </p:sp>
       <p:sp>
         <p:nvSpPr>
-          <p:cNvPr id="5" name="Shape 3"/>
+          <p:cNvPr id="6" name="Shape 4"/>
           <p:cNvSpPr/>
           <p:nvPr/>
         </p:nvSpPr>
         <p:spPr>
           <a:xfrm>
-            <a:off x="822960" y="2395728"/>
+            <a:off x="822960" y="2724912"/>
             <a:ext cx="548640" cy="548640"/>
           </a:xfrm>
           <a:prstGeom prst="ellipse">
@@ -5833,13 +5911,13 @@
       </p:sp>
       <p:sp>
         <p:nvSpPr>
-          <p:cNvPr id="6" name="Text 4"/>
-          <p:cNvSpPr txBox="1"/>
-          <p:nvPr/>
-        </p:nvSpPr>
-        <p:spPr>
-          <a:xfrm>
-            <a:off x="822960" y="2395728"/>
+          <p:cNvPr id="7" name="Text 5"/>
+          <p:cNvSpPr txBox="1"/>
+          <p:nvPr/>
+        </p:nvSpPr>
+        <p:spPr>
+          <a:xfrm>
+            <a:off x="822960" y="2724912"/>
             <a:ext cx="548640" cy="548640"/>
           </a:xfrm>
           <a:prstGeom prst="rect">
@@ -5872,13 +5950,13 @@
       </p:sp>
       <p:sp>
         <p:nvSpPr>
-          <p:cNvPr id="7" name="Text 5"/>
-          <p:cNvSpPr txBox="1"/>
-          <p:nvPr/>
-        </p:nvSpPr>
-        <p:spPr>
-          <a:xfrm>
-            <a:off x="1508760" y="2359152"/>
+          <p:cNvPr id="8" name="Text 6"/>
+          <p:cNvSpPr txBox="1"/>
+          <p:nvPr/>
+        </p:nvSpPr>
+        <p:spPr>
+          <a:xfrm>
+            <a:off x="1508760" y="2688336"/>
             <a:ext cx="4206240" cy="548640"/>
           </a:xfrm>
           <a:prstGeom prst="rect">
@@ -5911,13 +5989,13 @@
       </p:sp>
       <p:sp>
         <p:nvSpPr>
-          <p:cNvPr id="8" name="Text 6"/>
-          <p:cNvSpPr txBox="1"/>
-          <p:nvPr/>
-        </p:nvSpPr>
-        <p:spPr>
-          <a:xfrm>
-            <a:off x="822960" y="3017520"/>
+          <p:cNvPr id="9" name="Text 7"/>
+          <p:cNvSpPr txBox="1"/>
+          <p:nvPr/>
+        </p:nvSpPr>
+        <p:spPr>
+          <a:xfrm>
+            <a:off x="822960" y="3346704"/>
             <a:ext cx="4846320" cy="822960"/>
           </a:xfrm>
           <a:prstGeom prst="rect">
@@ -5950,13 +6028,13 @@
       </p:sp>
       <p:sp>
         <p:nvSpPr>
-          <p:cNvPr id="9" name="Shape 7"/>
+          <p:cNvPr id="10" name="Shape 8"/>
           <p:cNvSpPr/>
           <p:nvPr/>
         </p:nvSpPr>
         <p:spPr>
           <a:xfrm>
-            <a:off x="6245352" y="2103120"/>
+            <a:off x="6245352" y="2432304"/>
             <a:ext cx="5394960" cy="1810512"/>
           </a:xfrm>
           <a:prstGeom prst="roundRect">
@@ -5977,13 +6055,13 @@
       </p:sp>
       <p:sp>
         <p:nvSpPr>
-          <p:cNvPr id="10" name="Shape 8"/>
+          <p:cNvPr id="11" name="Shape 9"/>
           <p:cNvSpPr/>
           <p:nvPr/>
         </p:nvSpPr>
         <p:spPr>
           <a:xfrm>
-            <a:off x="6519672" y="2395728"/>
+            <a:off x="6519672" y="2724912"/>
             <a:ext cx="548640" cy="548640"/>
           </a:xfrm>
           <a:prstGeom prst="ellipse">
@@ -5997,13 +6075,13 @@
       </p:sp>
       <p:sp>
         <p:nvSpPr>
-          <p:cNvPr id="11" name="Text 9"/>
-          <p:cNvSpPr txBox="1"/>
-          <p:nvPr/>
-        </p:nvSpPr>
-        <p:spPr>
-          <a:xfrm>
-            <a:off x="6519672" y="2395728"/>
+          <p:cNvPr id="12" name="Text 10"/>
+          <p:cNvSpPr txBox="1"/>
+          <p:nvPr/>
+        </p:nvSpPr>
+        <p:spPr>
+          <a:xfrm>
+            <a:off x="6519672" y="2724912"/>
             <a:ext cx="548640" cy="548640"/>
           </a:xfrm>
           <a:prstGeom prst="rect">
@@ -6036,13 +6114,13 @@
       </p:sp>
       <p:sp>
         <p:nvSpPr>
-          <p:cNvPr id="12" name="Text 10"/>
-          <p:cNvSpPr txBox="1"/>
-          <p:nvPr/>
-        </p:nvSpPr>
-        <p:spPr>
-          <a:xfrm>
-            <a:off x="7205472" y="2359152"/>
+          <p:cNvPr id="13" name="Text 11"/>
+          <p:cNvSpPr txBox="1"/>
+          <p:nvPr/>
+        </p:nvSpPr>
+        <p:spPr>
+          <a:xfrm>
+            <a:off x="7205472" y="2688336"/>
             <a:ext cx="4206240" cy="548640"/>
           </a:xfrm>
           <a:prstGeom prst="rect">
@@ -6075,13 +6153,13 @@
       </p:sp>
       <p:sp>
         <p:nvSpPr>
-          <p:cNvPr id="13" name="Text 11"/>
-          <p:cNvSpPr txBox="1"/>
-          <p:nvPr/>
-        </p:nvSpPr>
-        <p:spPr>
-          <a:xfrm>
-            <a:off x="6519672" y="3017520"/>
+          <p:cNvPr id="14" name="Text 12"/>
+          <p:cNvSpPr txBox="1"/>
+          <p:nvPr/>
+        </p:nvSpPr>
+        <p:spPr>
+          <a:xfrm>
+            <a:off x="6519672" y="3346704"/>
             <a:ext cx="4846320" cy="822960"/>
           </a:xfrm>
           <a:prstGeom prst="rect">
@@ -6114,13 +6192,13 @@
       </p:sp>
       <p:sp>
         <p:nvSpPr>
-          <p:cNvPr id="14" name="Shape 12"/>
+          <p:cNvPr id="15" name="Shape 13"/>
           <p:cNvSpPr/>
           <p:nvPr/>
         </p:nvSpPr>
         <p:spPr>
           <a:xfrm>
-            <a:off x="548640" y="4114800"/>
+            <a:off x="548640" y="4443984"/>
             <a:ext cx="5394960" cy="1810512"/>
           </a:xfrm>
           <a:prstGeom prst="roundRect">
@@ -6141,13 +6219,13 @@
       </p:sp>
       <p:sp>
         <p:nvSpPr>
-          <p:cNvPr id="15" name="Shape 13"/>
+          <p:cNvPr id="16" name="Shape 14"/>
           <p:cNvSpPr/>
           <p:nvPr/>
         </p:nvSpPr>
         <p:spPr>
           <a:xfrm>
-            <a:off x="822960" y="4407408"/>
+            <a:off x="822960" y="4736592"/>
             <a:ext cx="548640" cy="548640"/>
           </a:xfrm>
           <a:prstGeom prst="ellipse">
@@ -6161,13 +6239,13 @@
       </p:sp>
       <p:sp>
         <p:nvSpPr>
-          <p:cNvPr id="16" name="Text 14"/>
-          <p:cNvSpPr txBox="1"/>
-          <p:nvPr/>
-        </p:nvSpPr>
-        <p:spPr>
-          <a:xfrm>
-            <a:off x="822960" y="4407408"/>
+          <p:cNvPr id="17" name="Text 15"/>
+          <p:cNvSpPr txBox="1"/>
+          <p:nvPr/>
+        </p:nvSpPr>
+        <p:spPr>
+          <a:xfrm>
+            <a:off x="822960" y="4736592"/>
             <a:ext cx="548640" cy="548640"/>
           </a:xfrm>
           <a:prstGeom prst="rect">
@@ -6200,13 +6278,13 @@
       </p:sp>
       <p:sp>
         <p:nvSpPr>
-          <p:cNvPr id="17" name="Text 15"/>
-          <p:cNvSpPr txBox="1"/>
-          <p:nvPr/>
-        </p:nvSpPr>
-        <p:spPr>
-          <a:xfrm>
-            <a:off x="1508760" y="4370832"/>
+          <p:cNvPr id="18" name="Text 16"/>
+          <p:cNvSpPr txBox="1"/>
+          <p:nvPr/>
+        </p:nvSpPr>
+        <p:spPr>
+          <a:xfrm>
+            <a:off x="1508760" y="4700016"/>
             <a:ext cx="4206240" cy="548640"/>
           </a:xfrm>
           <a:prstGeom prst="rect">
@@ -6239,13 +6317,13 @@
       </p:sp>
       <p:sp>
         <p:nvSpPr>
-          <p:cNvPr id="18" name="Text 16"/>
-          <p:cNvSpPr txBox="1"/>
-          <p:nvPr/>
-        </p:nvSpPr>
-        <p:spPr>
-          <a:xfrm>
-            <a:off x="822960" y="5029200"/>
+          <p:cNvPr id="19" name="Text 17"/>
+          <p:cNvSpPr txBox="1"/>
+          <p:nvPr/>
+        </p:nvSpPr>
+        <p:spPr>
+          <a:xfrm>
+            <a:off x="822960" y="5358384"/>
             <a:ext cx="4846320" cy="822960"/>
           </a:xfrm>
           <a:prstGeom prst="rect">
@@ -6278,13 +6356,13 @@
       </p:sp>
       <p:sp>
         <p:nvSpPr>
-          <p:cNvPr id="19" name="Shape 17"/>
+          <p:cNvPr id="20" name="Shape 18"/>
           <p:cNvSpPr/>
           <p:nvPr/>
         </p:nvSpPr>
         <p:spPr>
           <a:xfrm>
-            <a:off x="6245352" y="4114800"/>
+            <a:off x="6245352" y="4443984"/>
             <a:ext cx="5394960" cy="1810512"/>
           </a:xfrm>
           <a:prstGeom prst="roundRect">
@@ -6305,13 +6383,13 @@
       </p:sp>
       <p:sp>
         <p:nvSpPr>
-          <p:cNvPr id="20" name="Shape 18"/>
+          <p:cNvPr id="21" name="Shape 19"/>
           <p:cNvSpPr/>
           <p:nvPr/>
         </p:nvSpPr>
         <p:spPr>
           <a:xfrm>
-            <a:off x="6519672" y="4407408"/>
+            <a:off x="6519672" y="4736592"/>
             <a:ext cx="548640" cy="548640"/>
           </a:xfrm>
           <a:prstGeom prst="ellipse">
@@ -6325,13 +6403,13 @@
       </p:sp>
       <p:sp>
         <p:nvSpPr>
-          <p:cNvPr id="21" name="Text 19"/>
-          <p:cNvSpPr txBox="1"/>
-          <p:nvPr/>
-        </p:nvSpPr>
-        <p:spPr>
-          <a:xfrm>
-            <a:off x="6519672" y="4407408"/>
+          <p:cNvPr id="22" name="Text 20"/>
+          <p:cNvSpPr txBox="1"/>
+          <p:nvPr/>
+        </p:nvSpPr>
+        <p:spPr>
+          <a:xfrm>
+            <a:off x="6519672" y="4736592"/>
             <a:ext cx="548640" cy="548640"/>
           </a:xfrm>
           <a:prstGeom prst="rect">
@@ -6364,13 +6442,13 @@
       </p:sp>
       <p:sp>
         <p:nvSpPr>
-          <p:cNvPr id="22" name="Text 20"/>
-          <p:cNvSpPr txBox="1"/>
-          <p:nvPr/>
-        </p:nvSpPr>
-        <p:spPr>
-          <a:xfrm>
-            <a:off x="7205472" y="4370832"/>
+          <p:cNvPr id="23" name="Text 21"/>
+          <p:cNvSpPr txBox="1"/>
+          <p:nvPr/>
+        </p:nvSpPr>
+        <p:spPr>
+          <a:xfrm>
+            <a:off x="7205472" y="4700016"/>
             <a:ext cx="4206240" cy="548640"/>
           </a:xfrm>
           <a:prstGeom prst="rect">
@@ -6403,13 +6481,13 @@
       </p:sp>
       <p:sp>
         <p:nvSpPr>
-          <p:cNvPr id="23" name="Text 21"/>
-          <p:cNvSpPr txBox="1"/>
-          <p:nvPr/>
-        </p:nvSpPr>
-        <p:spPr>
-          <a:xfrm>
-            <a:off x="6519672" y="5029200"/>
+          <p:cNvPr id="24" name="Text 22"/>
+          <p:cNvSpPr txBox="1"/>
+          <p:nvPr/>
+        </p:nvSpPr>
+        <p:spPr>
+          <a:xfrm>
+            <a:off x="6519672" y="5358384"/>
             <a:ext cx="4846320" cy="822960"/>
           </a:xfrm>
           <a:prstGeom prst="rect">
@@ -6442,7 +6520,7 @@
       </p:sp>
       <p:sp>
         <p:nvSpPr>
-          <p:cNvPr id="24" name="Shape 22"/>
+          <p:cNvPr id="25" name="Shape 23"/>
           <p:cNvSpPr/>
           <p:nvPr/>
         </p:nvSpPr>
@@ -6464,7 +6542,7 @@
       </p:sp>
       <p:sp>
         <p:nvSpPr>
-          <p:cNvPr id="25" name="Text 23"/>
+          <p:cNvPr id="26" name="Text 24"/>
           <p:cNvSpPr txBox="1"/>
           <p:nvPr/>
         </p:nvSpPr>
@@ -6503,7 +6581,7 @@
       </p:sp>
       <p:sp>
         <p:nvSpPr>
-          <p:cNvPr id="26" name="Text 24"/>
+          <p:cNvPr id="27" name="Text 25"/>
           <p:cNvSpPr txBox="1"/>
           <p:nvPr/>
         </p:nvSpPr>
@@ -6542,7 +6620,7 @@
       </p:sp>
       <p:sp>
         <p:nvSpPr>
-          <p:cNvPr id="27" name="Text 25"/>
+          <p:cNvPr id="28" name="Text 26"/>
           <p:cNvSpPr txBox="1"/>
           <p:nvPr/>
         </p:nvSpPr>
@@ -6697,8 +6775,47 @@
         </p:nvSpPr>
         <p:spPr>
           <a:xfrm>
-            <a:off x="548640" y="2057400"/>
-            <a:ext cx="4709160" cy="3749040"/>
+            <a:off x="548640" y="1627632"/>
+            <a:ext cx="10881360" cy="502920"/>
+          </a:xfrm>
+          <a:prstGeom prst="rect">
+            <a:avLst/>
+          </a:prstGeom>
+          <a:noFill/>
+          <a:ln/>
+        </p:spPr>
+        <p:txBody>
+          <a:bodyPr wrap="square" lIns="0" tIns="0" rIns="0" bIns="0" rtlCol="0" anchor="t"/>
+          <a:lstStyle/>
+          <a:p>
+            <a:pPr algn="l" indent="0" marL="0">
+              <a:buNone/>
+            </a:pPr>
+            <a:r>
+              <a:rPr lang="en-US" sz="1500" dirty="0">
+                <a:solidFill>
+                  <a:srgbClr val="A9B1D6"/>
+                </a:solidFill>
+                <a:latin typeface="Calibri" pitchFamily="34" charset="0"/>
+                <a:ea typeface="Calibri" pitchFamily="34" charset="-122"/>
+                <a:cs typeface="Calibri" pitchFamily="34" charset="-120"/>
+              </a:rPr>
+              <a:t>Let's watch a friendly-looking document quietly hijack a bot that was only trying to be helpful.</a:t>
+            </a:r>
+            <a:endParaRPr lang="en-US" sz="1500" dirty="0"/>
+          </a:p>
+        </p:txBody>
+      </p:sp>
+      <p:sp>
+        <p:nvSpPr>
+          <p:cNvPr id="5" name="Text 3"/>
+          <p:cNvSpPr txBox="1"/>
+          <p:nvPr/>
+        </p:nvSpPr>
+        <p:spPr>
+          <a:xfrm>
+            <a:off x="548640" y="2386584"/>
+            <a:ext cx="4709160" cy="3419856"/>
           </a:xfrm>
           <a:prstGeom prst="rect">
             <a:avLst/>
@@ -6836,18 +6953,18 @@
       </p:sp>
       <p:sp>
         <p:nvSpPr>
-          <p:cNvPr id="5" name="Shape 3"/>
+          <p:cNvPr id="6" name="Shape 4"/>
           <p:cNvSpPr/>
           <p:nvPr/>
         </p:nvSpPr>
         <p:spPr>
           <a:xfrm>
-            <a:off x="5532120" y="2057400"/>
-            <a:ext cx="6108192" cy="3794760"/>
+            <a:off x="5532120" y="2386584"/>
+            <a:ext cx="6108192" cy="3465576"/>
           </a:xfrm>
           <a:prstGeom prst="roundRect">
             <a:avLst>
-              <a:gd name="adj" fmla="val 1446"/>
+              <a:gd name="adj" fmla="val 1583"/>
             </a:avLst>
           </a:prstGeom>
           <a:solidFill>
@@ -6863,13 +6980,13 @@
       </p:sp>
       <p:sp>
         <p:nvSpPr>
-          <p:cNvPr id="6" name="Text 4"/>
-          <p:cNvSpPr txBox="1"/>
-          <p:nvPr/>
-        </p:nvSpPr>
-        <p:spPr>
-          <a:xfrm>
-            <a:off x="5760720" y="2194560"/>
+          <p:cNvPr id="7" name="Text 5"/>
+          <p:cNvSpPr txBox="1"/>
+          <p:nvPr/>
+        </p:nvSpPr>
+        <p:spPr>
+          <a:xfrm>
+            <a:off x="5760720" y="2523744"/>
             <a:ext cx="5650992" cy="320040"/>
           </a:xfrm>
           <a:prstGeom prst="rect">
@@ -6902,14 +7019,14 @@
       </p:sp>
       <p:sp>
         <p:nvSpPr>
-          <p:cNvPr id="7" name="Text 5"/>
-          <p:cNvSpPr txBox="1"/>
-          <p:nvPr/>
-        </p:nvSpPr>
-        <p:spPr>
-          <a:xfrm>
-            <a:off x="5788152" y="2560320"/>
-            <a:ext cx="5596128" cy="3108960"/>
+          <p:cNvPr id="8" name="Text 6"/>
+          <p:cNvSpPr txBox="1"/>
+          <p:nvPr/>
+        </p:nvSpPr>
+        <p:spPr>
+          <a:xfrm>
+            <a:off x="5788152" y="2889504"/>
+            <a:ext cx="5596128" cy="2779776"/>
           </a:xfrm>
           <a:prstGeom prst="rect">
             <a:avLst/>
@@ -7084,7 +7201,7 @@
       </p:sp>
       <p:sp>
         <p:nvSpPr>
-          <p:cNvPr id="8" name="Shape 6"/>
+          <p:cNvPr id="9" name="Shape 7"/>
           <p:cNvSpPr/>
           <p:nvPr/>
         </p:nvSpPr>
@@ -7106,7 +7223,7 @@
       </p:sp>
       <p:sp>
         <p:nvSpPr>
-          <p:cNvPr id="9" name="Text 7"/>
+          <p:cNvPr id="10" name="Text 8"/>
           <p:cNvSpPr txBox="1"/>
           <p:nvPr/>
         </p:nvSpPr>
@@ -7145,7 +7262,7 @@
       </p:sp>
       <p:sp>
         <p:nvSpPr>
-          <p:cNvPr id="10" name="Text 8"/>
+          <p:cNvPr id="11" name="Text 9"/>
           <p:cNvSpPr txBox="1"/>
           <p:nvPr/>
         </p:nvSpPr>
@@ -7184,7 +7301,7 @@
       </p:sp>
       <p:sp>
         <p:nvSpPr>
-          <p:cNvPr id="11" name="Text 9"/>
+          <p:cNvPr id="12" name="Text 10"/>
           <p:cNvSpPr txBox="1"/>
           <p:nvPr/>
         </p:nvSpPr>
@@ -7333,18 +7450,57 @@
       </p:sp>
       <p:sp>
         <p:nvSpPr>
-          <p:cNvPr id="4" name="Shape 2"/>
+          <p:cNvPr id="4" name="Text 2"/>
+          <p:cNvSpPr txBox="1"/>
+          <p:nvPr/>
+        </p:nvSpPr>
+        <p:spPr>
+          <a:xfrm>
+            <a:off x="548640" y="1627632"/>
+            <a:ext cx="10881360" cy="502920"/>
+          </a:xfrm>
+          <a:prstGeom prst="rect">
+            <a:avLst/>
+          </a:prstGeom>
+          <a:noFill/>
+          <a:ln/>
+        </p:spPr>
+        <p:txBody>
+          <a:bodyPr wrap="square" lIns="0" tIns="0" rIns="0" bIns="0" rtlCol="0" anchor="t"/>
+          <a:lstStyle/>
+          <a:p>
+            <a:pPr algn="l" indent="0" marL="0">
+              <a:buNone/>
+            </a:pPr>
+            <a:r>
+              <a:rPr lang="en-US" sz="1500" dirty="0">
+                <a:solidFill>
+                  <a:srgbClr val="A9B1D6"/>
+                </a:solidFill>
+                <a:latin typeface="Calibri" pitchFamily="34" charset="0"/>
+                <a:ea typeface="Calibri" pitchFamily="34" charset="-122"/>
+                <a:cs typeface="Calibri" pitchFamily="34" charset="-120"/>
+              </a:rPr>
+              <a:t>There's no single fix, so you defend in layers — checking both what goes in and what comes out.</a:t>
+            </a:r>
+            <a:endParaRPr lang="en-US" sz="1500" dirty="0"/>
+          </a:p>
+        </p:txBody>
+      </p:sp>
+      <p:sp>
+        <p:nvSpPr>
+          <p:cNvPr id="5" name="Shape 3"/>
           <p:cNvSpPr/>
           <p:nvPr/>
         </p:nvSpPr>
         <p:spPr>
           <a:xfrm>
-            <a:off x="548640" y="2103120"/>
-            <a:ext cx="5440680" cy="3703320"/>
+            <a:off x="548640" y="2432304"/>
+            <a:ext cx="5440680" cy="3374136"/>
           </a:xfrm>
           <a:prstGeom prst="roundRect">
             <a:avLst>
-              <a:gd name="adj" fmla="val 2222"/>
+              <a:gd name="adj" fmla="val 2439"/>
             </a:avLst>
           </a:prstGeom>
           <a:solidFill>
@@ -7360,13 +7516,13 @@
       </p:sp>
       <p:sp>
         <p:nvSpPr>
-          <p:cNvPr id="5" name="Shape 3"/>
+          <p:cNvPr id="6" name="Shape 4"/>
           <p:cNvSpPr/>
           <p:nvPr/>
         </p:nvSpPr>
         <p:spPr>
           <a:xfrm>
-            <a:off x="822960" y="2395728"/>
+            <a:off x="822960" y="2724912"/>
             <a:ext cx="457200" cy="457200"/>
           </a:xfrm>
           <a:prstGeom prst="ellipse">
@@ -7380,13 +7536,13 @@
       </p:sp>
       <p:sp>
         <p:nvSpPr>
-          <p:cNvPr id="6" name="Text 4"/>
-          <p:cNvSpPr txBox="1"/>
-          <p:nvPr/>
-        </p:nvSpPr>
-        <p:spPr>
-          <a:xfrm>
-            <a:off x="822960" y="2395728"/>
+          <p:cNvPr id="7" name="Text 5"/>
+          <p:cNvSpPr txBox="1"/>
+          <p:nvPr/>
+        </p:nvSpPr>
+        <p:spPr>
+          <a:xfrm>
+            <a:off x="822960" y="2724912"/>
             <a:ext cx="457200" cy="457200"/>
           </a:xfrm>
           <a:prstGeom prst="rect">
@@ -7419,13 +7575,13 @@
       </p:sp>
       <p:sp>
         <p:nvSpPr>
-          <p:cNvPr id="7" name="Text 5"/>
-          <p:cNvSpPr txBox="1"/>
-          <p:nvPr/>
-        </p:nvSpPr>
-        <p:spPr>
-          <a:xfrm>
-            <a:off x="1417320" y="2359152"/>
+          <p:cNvPr id="8" name="Text 6"/>
+          <p:cNvSpPr txBox="1"/>
+          <p:nvPr/>
+        </p:nvSpPr>
+        <p:spPr>
+          <a:xfrm>
+            <a:off x="1417320" y="2688336"/>
             <a:ext cx="4343400" cy="548640"/>
           </a:xfrm>
           <a:prstGeom prst="rect">
@@ -7458,14 +7614,14 @@
       </p:sp>
       <p:sp>
         <p:nvSpPr>
-          <p:cNvPr id="8" name="Text 6"/>
-          <p:cNvSpPr txBox="1"/>
-          <p:nvPr/>
-        </p:nvSpPr>
-        <p:spPr>
-          <a:xfrm>
-            <a:off x="868680" y="3063240"/>
-            <a:ext cx="4800600" cy="2560320"/>
+          <p:cNvPr id="9" name="Text 7"/>
+          <p:cNvSpPr txBox="1"/>
+          <p:nvPr/>
+        </p:nvSpPr>
+        <p:spPr>
+          <a:xfrm>
+            <a:off x="868680" y="3392424"/>
+            <a:ext cx="4800600" cy="2231136"/>
           </a:xfrm>
           <a:prstGeom prst="rect">
             <a:avLst/>
@@ -7564,18 +7720,18 @@
       </p:sp>
       <p:sp>
         <p:nvSpPr>
-          <p:cNvPr id="9" name="Shape 7"/>
+          <p:cNvPr id="10" name="Shape 8"/>
           <p:cNvSpPr/>
           <p:nvPr/>
         </p:nvSpPr>
         <p:spPr>
           <a:xfrm>
-            <a:off x="6199632" y="2103120"/>
-            <a:ext cx="5440680" cy="3703320"/>
+            <a:off x="6199632" y="2432304"/>
+            <a:ext cx="5440680" cy="3374136"/>
           </a:xfrm>
           <a:prstGeom prst="roundRect">
             <a:avLst>
-              <a:gd name="adj" fmla="val 2222"/>
+              <a:gd name="adj" fmla="val 2439"/>
             </a:avLst>
           </a:prstGeom>
           <a:solidFill>
@@ -7591,13 +7747,13 @@
       </p:sp>
       <p:sp>
         <p:nvSpPr>
-          <p:cNvPr id="10" name="Shape 8"/>
+          <p:cNvPr id="11" name="Shape 9"/>
           <p:cNvSpPr/>
           <p:nvPr/>
         </p:nvSpPr>
         <p:spPr>
           <a:xfrm>
-            <a:off x="6473952" y="2395728"/>
+            <a:off x="6473952" y="2724912"/>
             <a:ext cx="457200" cy="457200"/>
           </a:xfrm>
           <a:prstGeom prst="ellipse">
@@ -7611,13 +7767,13 @@
       </p:sp>
       <p:sp>
         <p:nvSpPr>
-          <p:cNvPr id="11" name="Text 9"/>
-          <p:cNvSpPr txBox="1"/>
-          <p:nvPr/>
-        </p:nvSpPr>
-        <p:spPr>
-          <a:xfrm>
-            <a:off x="6473952" y="2395728"/>
+          <p:cNvPr id="12" name="Text 10"/>
+          <p:cNvSpPr txBox="1"/>
+          <p:nvPr/>
+        </p:nvSpPr>
+        <p:spPr>
+          <a:xfrm>
+            <a:off x="6473952" y="2724912"/>
             <a:ext cx="457200" cy="457200"/>
           </a:xfrm>
           <a:prstGeom prst="rect">
@@ -7650,13 +7806,13 @@
       </p:sp>
       <p:sp>
         <p:nvSpPr>
-          <p:cNvPr id="12" name="Text 10"/>
-          <p:cNvSpPr txBox="1"/>
-          <p:nvPr/>
-        </p:nvSpPr>
-        <p:spPr>
-          <a:xfrm>
-            <a:off x="7068312" y="2359152"/>
+          <p:cNvPr id="13" name="Text 11"/>
+          <p:cNvSpPr txBox="1"/>
+          <p:nvPr/>
+        </p:nvSpPr>
+        <p:spPr>
+          <a:xfrm>
+            <a:off x="7068312" y="2688336"/>
             <a:ext cx="4343400" cy="548640"/>
           </a:xfrm>
           <a:prstGeom prst="rect">
@@ -7689,14 +7845,14 @@
       </p:sp>
       <p:sp>
         <p:nvSpPr>
-          <p:cNvPr id="13" name="Text 11"/>
-          <p:cNvSpPr txBox="1"/>
-          <p:nvPr/>
-        </p:nvSpPr>
-        <p:spPr>
-          <a:xfrm>
-            <a:off x="6519672" y="3063240"/>
-            <a:ext cx="4800600" cy="2560320"/>
+          <p:cNvPr id="14" name="Text 12"/>
+          <p:cNvSpPr txBox="1"/>
+          <p:nvPr/>
+        </p:nvSpPr>
+        <p:spPr>
+          <a:xfrm>
+            <a:off x="6519672" y="3392424"/>
+            <a:ext cx="4800600" cy="2231136"/>
           </a:xfrm>
           <a:prstGeom prst="rect">
             <a:avLst/>
@@ -7795,7 +7951,7 @@
       </p:sp>
       <p:sp>
         <p:nvSpPr>
-          <p:cNvPr id="14" name="Shape 12"/>
+          <p:cNvPr id="15" name="Shape 13"/>
           <p:cNvSpPr/>
           <p:nvPr/>
         </p:nvSpPr>
@@ -7817,7 +7973,7 @@
       </p:sp>
       <p:sp>
         <p:nvSpPr>
-          <p:cNvPr id="15" name="Text 13"/>
+          <p:cNvPr id="16" name="Text 14"/>
           <p:cNvSpPr txBox="1"/>
           <p:nvPr/>
         </p:nvSpPr>
@@ -7856,7 +8012,7 @@
       </p:sp>
       <p:sp>
         <p:nvSpPr>
-          <p:cNvPr id="16" name="Text 14"/>
+          <p:cNvPr id="17" name="Text 15"/>
           <p:cNvSpPr txBox="1"/>
           <p:nvPr/>
         </p:nvSpPr>
@@ -7895,7 +8051,7 @@
       </p:sp>
       <p:sp>
         <p:nvSpPr>
-          <p:cNvPr id="17" name="Text 15"/>
+          <p:cNvPr id="18" name="Text 16"/>
           <p:cNvSpPr txBox="1"/>
           <p:nvPr/>
         </p:nvSpPr>
@@ -8050,8 +8206,47 @@
         </p:nvSpPr>
         <p:spPr>
           <a:xfrm>
-            <a:off x="548640" y="2011680"/>
-            <a:ext cx="6126480" cy="3840480"/>
+            <a:off x="548640" y="1627632"/>
+            <a:ext cx="10881360" cy="502920"/>
+          </a:xfrm>
+          <a:prstGeom prst="rect">
+            <a:avLst/>
+          </a:prstGeom>
+          <a:noFill/>
+          <a:ln/>
+        </p:spPr>
+        <p:txBody>
+          <a:bodyPr wrap="square" lIns="0" tIns="0" rIns="0" bIns="0" rtlCol="0" anchor="t"/>
+          <a:lstStyle/>
+          <a:p>
+            <a:pPr algn="l" indent="0" marL="0">
+              <a:buNone/>
+            </a:pPr>
+            <a:r>
+              <a:rPr lang="en-US" sz="1500" dirty="0">
+                <a:solidFill>
+                  <a:srgbClr val="A9B1D6"/>
+                </a:solidFill>
+                <a:latin typeface="Calibri" pitchFamily="34" charset="0"/>
+                <a:ea typeface="Calibri" pitchFamily="34" charset="-122"/>
+                <a:cs typeface="Calibri" pitchFamily="34" charset="-120"/>
+              </a:rPr>
+              <a:t>A few habits that keep sensitive data from ending up somewhere it shouldn't — including your own logs.</a:t>
+            </a:r>
+            <a:endParaRPr lang="en-US" sz="1500" dirty="0"/>
+          </a:p>
+        </p:txBody>
+      </p:sp>
+      <p:sp>
+        <p:nvSpPr>
+          <p:cNvPr id="5" name="Text 3"/>
+          <p:cNvSpPr txBox="1"/>
+          <p:nvPr/>
+        </p:nvSpPr>
+        <p:spPr>
+          <a:xfrm>
+            <a:off x="548640" y="2340864"/>
+            <a:ext cx="6126480" cy="3511296"/>
           </a:xfrm>
           <a:prstGeom prst="rect">
             <a:avLst/>
@@ -8189,18 +8384,18 @@
       </p:sp>
       <p:sp>
         <p:nvSpPr>
-          <p:cNvPr id="5" name="Shape 3"/>
+          <p:cNvPr id="6" name="Shape 4"/>
           <p:cNvSpPr/>
           <p:nvPr/>
         </p:nvSpPr>
         <p:spPr>
           <a:xfrm>
-            <a:off x="6995160" y="2148840"/>
-            <a:ext cx="4645152" cy="3383280"/>
+            <a:off x="6995160" y="2478024"/>
+            <a:ext cx="4645152" cy="3054096"/>
           </a:xfrm>
           <a:prstGeom prst="roundRect">
             <a:avLst>
-              <a:gd name="adj" fmla="val 2432"/>
+              <a:gd name="adj" fmla="val 2695"/>
             </a:avLst>
           </a:prstGeom>
           <a:solidFill>
@@ -8216,13 +8411,13 @@
       </p:sp>
       <p:sp>
         <p:nvSpPr>
-          <p:cNvPr id="6" name="Shape 4"/>
+          <p:cNvPr id="7" name="Shape 5"/>
           <p:cNvSpPr/>
           <p:nvPr/>
         </p:nvSpPr>
         <p:spPr>
           <a:xfrm>
-            <a:off x="7269480" y="2423160"/>
+            <a:off x="7269480" y="2752344"/>
             <a:ext cx="457200" cy="457200"/>
           </a:xfrm>
           <a:prstGeom prst="ellipse">
@@ -8236,13 +8431,13 @@
       </p:sp>
       <p:sp>
         <p:nvSpPr>
-          <p:cNvPr id="7" name="Text 5"/>
-          <p:cNvSpPr txBox="1"/>
-          <p:nvPr/>
-        </p:nvSpPr>
-        <p:spPr>
-          <a:xfrm>
-            <a:off x="7818120" y="2450592"/>
+          <p:cNvPr id="8" name="Text 6"/>
+          <p:cNvSpPr txBox="1"/>
+          <p:nvPr/>
+        </p:nvSpPr>
+        <p:spPr>
+          <a:xfrm>
+            <a:off x="7818120" y="2779776"/>
             <a:ext cx="3657600" cy="411480"/>
           </a:xfrm>
           <a:prstGeom prst="rect">
@@ -8275,14 +8470,14 @@
       </p:sp>
       <p:sp>
         <p:nvSpPr>
-          <p:cNvPr id="8" name="Text 6"/>
-          <p:cNvSpPr txBox="1"/>
-          <p:nvPr/>
-        </p:nvSpPr>
-        <p:spPr>
-          <a:xfrm>
-            <a:off x="7269480" y="3108960"/>
-            <a:ext cx="4160520" cy="2286000"/>
+          <p:cNvPr id="9" name="Text 7"/>
+          <p:cNvSpPr txBox="1"/>
+          <p:nvPr/>
+        </p:nvSpPr>
+        <p:spPr>
+          <a:xfrm>
+            <a:off x="7269480" y="3438144"/>
+            <a:ext cx="4160520" cy="1865376"/>
           </a:xfrm>
           <a:prstGeom prst="rect">
             <a:avLst/>
@@ -8314,7 +8509,7 @@
       </p:sp>
       <p:sp>
         <p:nvSpPr>
-          <p:cNvPr id="9" name="Shape 7"/>
+          <p:cNvPr id="10" name="Shape 8"/>
           <p:cNvSpPr/>
           <p:nvPr/>
         </p:nvSpPr>
@@ -8336,7 +8531,7 @@
       </p:sp>
       <p:sp>
         <p:nvSpPr>
-          <p:cNvPr id="10" name="Text 8"/>
+          <p:cNvPr id="11" name="Text 9"/>
           <p:cNvSpPr txBox="1"/>
           <p:nvPr/>
         </p:nvSpPr>
@@ -8375,7 +8570,7 @@
       </p:sp>
       <p:sp>
         <p:nvSpPr>
-          <p:cNvPr id="11" name="Text 9"/>
+          <p:cNvPr id="12" name="Text 10"/>
           <p:cNvSpPr txBox="1"/>
           <p:nvPr/>
         </p:nvSpPr>
@@ -8414,7 +8609,7 @@
       </p:sp>
       <p:sp>
         <p:nvSpPr>
-          <p:cNvPr id="12" name="Text 10"/>
+          <p:cNvPr id="13" name="Text 11"/>
           <p:cNvSpPr txBox="1"/>
           <p:nvPr/>
         </p:nvSpPr>
@@ -8569,8 +8764,47 @@
         </p:nvSpPr>
         <p:spPr>
           <a:xfrm>
-            <a:off x="548640" y="2011680"/>
-            <a:ext cx="6126480" cy="3840480"/>
+            <a:off x="548640" y="1627632"/>
+            <a:ext cx="10881360" cy="502920"/>
+          </a:xfrm>
+          <a:prstGeom prst="rect">
+            <a:avLst/>
+          </a:prstGeom>
+          <a:noFill/>
+          <a:ln/>
+        </p:spPr>
+        <p:txBody>
+          <a:bodyPr wrap="square" lIns="0" tIns="0" rIns="0" bIns="0" rtlCol="0" anchor="t"/>
+          <a:lstStyle/>
+          <a:p>
+            <a:pPr algn="l" indent="0" marL="0">
+              <a:buNone/>
+            </a:pPr>
+            <a:r>
+              <a:rPr lang="en-US" sz="1500" dirty="0">
+                <a:solidFill>
+                  <a:srgbClr val="A9B1D6"/>
+                </a:solidFill>
+                <a:latin typeface="Calibri" pitchFamily="34" charset="0"/>
+                <a:ea typeface="Calibri" pitchFamily="34" charset="-122"/>
+                <a:cs typeface="Calibri" pitchFamily="34" charset="-120"/>
+              </a:rPr>
+              <a:t>Let's end honest: this is an open problem, and maturity means designing for it rather than pretending it's solved.</a:t>
+            </a:r>
+            <a:endParaRPr lang="en-US" sz="1500" dirty="0"/>
+          </a:p>
+        </p:txBody>
+      </p:sp>
+      <p:sp>
+        <p:nvSpPr>
+          <p:cNvPr id="5" name="Text 3"/>
+          <p:cNvSpPr txBox="1"/>
+          <p:nvPr/>
+        </p:nvSpPr>
+        <p:spPr>
+          <a:xfrm>
+            <a:off x="548640" y="2340864"/>
+            <a:ext cx="6126480" cy="3511296"/>
           </a:xfrm>
           <a:prstGeom prst="rect">
             <a:avLst/>
@@ -8708,18 +8942,18 @@
       </p:sp>
       <p:sp>
         <p:nvSpPr>
-          <p:cNvPr id="5" name="Shape 3"/>
+          <p:cNvPr id="6" name="Shape 4"/>
           <p:cNvSpPr/>
           <p:nvPr/>
         </p:nvSpPr>
         <p:spPr>
           <a:xfrm>
-            <a:off x="6995160" y="2148840"/>
-            <a:ext cx="4645152" cy="3383280"/>
+            <a:off x="6995160" y="2478024"/>
+            <a:ext cx="4645152" cy="3054096"/>
           </a:xfrm>
           <a:prstGeom prst="roundRect">
             <a:avLst>
-              <a:gd name="adj" fmla="val 2432"/>
+              <a:gd name="adj" fmla="val 2695"/>
             </a:avLst>
           </a:prstGeom>
           <a:solidFill>
@@ -8735,13 +8969,13 @@
       </p:sp>
       <p:sp>
         <p:nvSpPr>
-          <p:cNvPr id="6" name="Shape 4"/>
+          <p:cNvPr id="7" name="Shape 5"/>
           <p:cNvSpPr/>
           <p:nvPr/>
         </p:nvSpPr>
         <p:spPr>
           <a:xfrm>
-            <a:off x="7269480" y="2423160"/>
+            <a:off x="7269480" y="2752344"/>
             <a:ext cx="457200" cy="457200"/>
           </a:xfrm>
           <a:prstGeom prst="ellipse">
@@ -8755,13 +8989,13 @@
       </p:sp>
       <p:sp>
         <p:nvSpPr>
-          <p:cNvPr id="7" name="Text 5"/>
-          <p:cNvSpPr txBox="1"/>
-          <p:nvPr/>
-        </p:nvSpPr>
-        <p:spPr>
-          <a:xfrm>
-            <a:off x="7818120" y="2450592"/>
+          <p:cNvPr id="8" name="Text 6"/>
+          <p:cNvSpPr txBox="1"/>
+          <p:nvPr/>
+        </p:nvSpPr>
+        <p:spPr>
+          <a:xfrm>
+            <a:off x="7818120" y="2779776"/>
             <a:ext cx="3657600" cy="411480"/>
           </a:xfrm>
           <a:prstGeom prst="rect">
@@ -8794,14 +9028,14 @@
       </p:sp>
       <p:sp>
         <p:nvSpPr>
-          <p:cNvPr id="8" name="Text 6"/>
-          <p:cNvSpPr txBox="1"/>
-          <p:nvPr/>
-        </p:nvSpPr>
-        <p:spPr>
-          <a:xfrm>
-            <a:off x="7269480" y="3108960"/>
-            <a:ext cx="4160520" cy="2286000"/>
+          <p:cNvPr id="9" name="Text 7"/>
+          <p:cNvSpPr txBox="1"/>
+          <p:nvPr/>
+        </p:nvSpPr>
+        <p:spPr>
+          <a:xfrm>
+            <a:off x="7269480" y="3438144"/>
+            <a:ext cx="4160520" cy="1865376"/>
           </a:xfrm>
           <a:prstGeom prst="rect">
             <a:avLst/>
@@ -8833,7 +9067,7 @@
       </p:sp>
       <p:sp>
         <p:nvSpPr>
-          <p:cNvPr id="9" name="Shape 7"/>
+          <p:cNvPr id="10" name="Shape 8"/>
           <p:cNvSpPr/>
           <p:nvPr/>
         </p:nvSpPr>
@@ -8855,7 +9089,7 @@
       </p:sp>
       <p:sp>
         <p:nvSpPr>
-          <p:cNvPr id="10" name="Text 8"/>
+          <p:cNvPr id="11" name="Text 9"/>
           <p:cNvSpPr txBox="1"/>
           <p:nvPr/>
         </p:nvSpPr>
@@ -8894,7 +9128,7 @@
       </p:sp>
       <p:sp>
         <p:nvSpPr>
-          <p:cNvPr id="11" name="Text 9"/>
+          <p:cNvPr id="12" name="Text 10"/>
           <p:cNvSpPr txBox="1"/>
           <p:nvPr/>
         </p:nvSpPr>
@@ -8933,7 +9167,7 @@
       </p:sp>
       <p:sp>
         <p:nvSpPr>
-          <p:cNvPr id="12" name="Text 10"/>
+          <p:cNvPr id="13" name="Text 11"/>
           <p:cNvSpPr txBox="1"/>
           <p:nvPr/>
         </p:nvSpPr>
